--- a/app/templates/universidad_azul/plantilla_diplomado.pptx
+++ b/app/templates/universidad_azul/plantilla_diplomado.pptx
@@ -122,9 +122,133 @@
 <file path=ppt/revisionInfo.xml><?xml version="1.0" encoding="utf-8"?>
 <p1510:revInfo xmlns:a="http://schemas.openxmlformats.org/drawingml/2006/main" xmlns:r="http://schemas.openxmlformats.org/officeDocument/2006/relationships" xmlns:p1510="http://schemas.microsoft.com/office/powerpoint/2015/10/main">
   <p1510:revLst>
-    <p1510:client id="{9376DF29-1C64-4DEC-9B79-909CC79311CB}" v="50" dt="2026-01-14T21:30:04.395"/>
+    <p1510:client id="{4EA50A64-F2EE-41C9-82F9-A5599628D266}" v="18" dt="2026-03-04T23:10:30.017"/>
   </p1510:revLst>
 </p1510:revInfo>
+</file>
+
+<file path=ppt/changesInfos/changesInfo1.xml><?xml version="1.0" encoding="utf-8"?>
+<pc:chgInfo xmlns:a="http://schemas.openxmlformats.org/drawingml/2006/main" xmlns:r="http://schemas.openxmlformats.org/officeDocument/2006/relationships" xmlns:ac="http://schemas.microsoft.com/office/drawing/2013/main/command" xmlns:pc="http://schemas.microsoft.com/office/powerpoint/2013/main/command">
+  <pc:docChgLst>
+    <pc:chgData name="Benjamín de Jesús Cueva Niño de Guzmán" userId="56da303013910523" providerId="LiveId" clId="{532B7A48-8887-4F62-9537-0BA1FAE83637}"/>
+    <pc:docChg chg="undo custSel modSld">
+      <pc:chgData name="Benjamín de Jesús Cueva Niño de Guzmán" userId="56da303013910523" providerId="LiveId" clId="{532B7A48-8887-4F62-9537-0BA1FAE83637}" dt="2026-03-05T18:30:06.025" v="224" actId="12788"/>
+      <pc:docMkLst>
+        <pc:docMk/>
+      </pc:docMkLst>
+      <pc:sldChg chg="addSp delSp modSp mod">
+        <pc:chgData name="Benjamín de Jesús Cueva Niño de Guzmán" userId="56da303013910523" providerId="LiveId" clId="{532B7A48-8887-4F62-9537-0BA1FAE83637}" dt="2026-03-05T18:30:06.025" v="224" actId="12788"/>
+        <pc:sldMkLst>
+          <pc:docMk/>
+          <pc:sldMk cId="1330590418" sldId="271"/>
+        </pc:sldMkLst>
+        <pc:spChg chg="mod">
+          <ac:chgData name="Benjamín de Jesús Cueva Niño de Guzmán" userId="56da303013910523" providerId="LiveId" clId="{532B7A48-8887-4F62-9537-0BA1FAE83637}" dt="2026-03-04T23:08:56.562" v="210" actId="1035"/>
+          <ac:spMkLst>
+            <pc:docMk/>
+            <pc:sldMk cId="1330590418" sldId="271"/>
+            <ac:spMk id="2" creationId="{8999ECBF-332A-795D-7E69-2FB7C2F9E294}"/>
+          </ac:spMkLst>
+        </pc:spChg>
+        <pc:spChg chg="mod">
+          <ac:chgData name="Benjamín de Jesús Cueva Niño de Guzmán" userId="56da303013910523" providerId="LiveId" clId="{532B7A48-8887-4F62-9537-0BA1FAE83637}" dt="2026-03-04T23:08:54.706" v="208" actId="1035"/>
+          <ac:spMkLst>
+            <pc:docMk/>
+            <pc:sldMk cId="1330590418" sldId="271"/>
+            <ac:spMk id="3" creationId="{8DC1C730-CF27-EE49-4929-25151E2F6190}"/>
+          </ac:spMkLst>
+        </pc:spChg>
+        <pc:spChg chg="add mod">
+          <ac:chgData name="Benjamín de Jesús Cueva Niño de Guzmán" userId="56da303013910523" providerId="LiveId" clId="{532B7A48-8887-4F62-9537-0BA1FAE83637}" dt="2026-03-04T23:10:30.017" v="221"/>
+          <ac:spMkLst>
+            <pc:docMk/>
+            <pc:sldMk cId="1330590418" sldId="271"/>
+            <ac:spMk id="5" creationId="{AFB6F93C-9F22-8EA7-7179-A5F6B3080552}"/>
+          </ac:spMkLst>
+        </pc:spChg>
+        <pc:spChg chg="del mod">
+          <ac:chgData name="Benjamín de Jesús Cueva Niño de Guzmán" userId="56da303013910523" providerId="LiveId" clId="{532B7A48-8887-4F62-9537-0BA1FAE83637}" dt="2026-03-04T23:10:27.344" v="220" actId="478"/>
+          <ac:spMkLst>
+            <pc:docMk/>
+            <pc:sldMk cId="1330590418" sldId="271"/>
+            <ac:spMk id="15" creationId="{6181BA67-E1F2-0033-0081-C78685C4EFFB}"/>
+          </ac:spMkLst>
+        </pc:spChg>
+        <pc:spChg chg="mod">
+          <ac:chgData name="Benjamín de Jesús Cueva Niño de Guzmán" userId="56da303013910523" providerId="LiveId" clId="{532B7A48-8887-4F62-9537-0BA1FAE83637}" dt="2026-03-05T18:30:06.025" v="224" actId="12788"/>
+          <ac:spMkLst>
+            <pc:docMk/>
+            <pc:sldMk cId="1330590418" sldId="271"/>
+            <ac:spMk id="19" creationId="{C0D9FAA0-08E8-BE91-7635-49B14F81758C}"/>
+          </ac:spMkLst>
+        </pc:spChg>
+        <pc:picChg chg="mod">
+          <ac:chgData name="Benjamín de Jesús Cueva Niño de Guzmán" userId="56da303013910523" providerId="LiveId" clId="{532B7A48-8887-4F62-9537-0BA1FAE83637}" dt="2026-02-27T19:54:21.101" v="1"/>
+          <ac:picMkLst>
+            <pc:docMk/>
+            <pc:sldMk cId="1330590418" sldId="271"/>
+            <ac:picMk id="4" creationId="{60DE8CCB-49A1-55D7-C9BB-F7CB1F5B3594}"/>
+          </ac:picMkLst>
+        </pc:picChg>
+        <pc:picChg chg="add mod">
+          <ac:chgData name="Benjamín de Jesús Cueva Niño de Guzmán" userId="56da303013910523" providerId="LiveId" clId="{532B7A48-8887-4F62-9537-0BA1FAE83637}" dt="2026-03-04T23:10:30.017" v="221"/>
+          <ac:picMkLst>
+            <pc:docMk/>
+            <pc:sldMk cId="1330590418" sldId="271"/>
+            <ac:picMk id="7" creationId="{74C6FC0B-5FDE-2C97-66FC-E9A609429D1C}"/>
+          </ac:picMkLst>
+        </pc:picChg>
+        <pc:picChg chg="mod">
+          <ac:chgData name="Benjamín de Jesús Cueva Niño de Guzmán" userId="56da303013910523" providerId="LiveId" clId="{532B7A48-8887-4F62-9537-0BA1FAE83637}" dt="2026-02-27T19:56:28.438" v="17" actId="12788"/>
+          <ac:picMkLst>
+            <pc:docMk/>
+            <pc:sldMk cId="1330590418" sldId="271"/>
+            <ac:picMk id="8" creationId="{6A27773A-14F1-8F70-059F-80FE08044C7F}"/>
+          </ac:picMkLst>
+        </pc:picChg>
+        <pc:picChg chg="del mod">
+          <ac:chgData name="Benjamín de Jesús Cueva Niño de Guzmán" userId="56da303013910523" providerId="LiveId" clId="{532B7A48-8887-4F62-9537-0BA1FAE83637}" dt="2026-03-04T23:10:27.344" v="220" actId="478"/>
+          <ac:picMkLst>
+            <pc:docMk/>
+            <pc:sldMk cId="1330590418" sldId="271"/>
+            <ac:picMk id="16" creationId="{8AFE8DB8-BB3D-9C4F-317A-D420ABEEF7CD}"/>
+          </ac:picMkLst>
+        </pc:picChg>
+      </pc:sldChg>
+      <pc:sldChg chg="modSp mod">
+        <pc:chgData name="Benjamín de Jesús Cueva Niño de Guzmán" userId="56da303013910523" providerId="LiveId" clId="{532B7A48-8887-4F62-9537-0BA1FAE83637}" dt="2026-02-27T22:28:00.143" v="200" actId="255"/>
+        <pc:sldMkLst>
+          <pc:docMk/>
+          <pc:sldMk cId="186929205" sldId="272"/>
+        </pc:sldMkLst>
+        <pc:spChg chg="mod">
+          <ac:chgData name="Benjamín de Jesús Cueva Niño de Guzmán" userId="56da303013910523" providerId="LiveId" clId="{532B7A48-8887-4F62-9537-0BA1FAE83637}" dt="2026-02-27T22:18:15.006" v="198" actId="962"/>
+          <ac:spMkLst>
+            <pc:docMk/>
+            <pc:sldMk cId="186929205" sldId="272"/>
+            <ac:spMk id="10" creationId="{D44B2567-D1AD-5922-21FA-C8B8BF799204}"/>
+          </ac:spMkLst>
+        </pc:spChg>
+        <pc:graphicFrameChg chg="mod modGraphic">
+          <ac:chgData name="Benjamín de Jesús Cueva Niño de Guzmán" userId="56da303013910523" providerId="LiveId" clId="{532B7A48-8887-4F62-9537-0BA1FAE83637}" dt="2026-02-27T22:28:00.143" v="200" actId="255"/>
+          <ac:graphicFrameMkLst>
+            <pc:docMk/>
+            <pc:sldMk cId="186929205" sldId="272"/>
+            <ac:graphicFrameMk id="14" creationId="{727B0309-C2F5-4DEB-3AF8-D7FD142D7B92}"/>
+          </ac:graphicFrameMkLst>
+        </pc:graphicFrameChg>
+        <pc:picChg chg="mod">
+          <ac:chgData name="Benjamín de Jesús Cueva Niño de Guzmán" userId="56da303013910523" providerId="LiveId" clId="{532B7A48-8887-4F62-9537-0BA1FAE83637}" dt="2026-02-27T19:56:39.075" v="18" actId="12788"/>
+          <ac:picMkLst>
+            <pc:docMk/>
+            <pc:sldMk cId="186929205" sldId="272"/>
+            <ac:picMk id="18" creationId="{A31EE33C-C2BD-2E42-1AD7-EE358415BDE5}"/>
+          </ac:picMkLst>
+        </pc:picChg>
+      </pc:sldChg>
+    </pc:docChg>
+  </pc:docChgLst>
+</pc:chgInfo>
 </file>
 
 <file path=ppt/handoutMasters/handoutMaster1.xml><?xml version="1.0" encoding="utf-8"?>
@@ -209,7 +333,7 @@
           <a:p>
             <a:fld id="{03C7FEFC-EB52-44D6-B3F1-2A7BB7FA4226}" type="datetimeFigureOut">
               <a:rPr lang="es-PE" smtClean="0"/>
-              <a:t>2/02/2026</a:t>
+              <a:t>7/06/2026</a:t>
             </a:fld>
             <a:endParaRPr lang="es-PE" dirty="0"/>
           </a:p>
@@ -374,7 +498,7 @@
           <a:p>
             <a:fld id="{64955E78-CBAA-441B-9163-D9CD5E983BDA}" type="datetimeFigureOut">
               <a:rPr lang="en-US" smtClean="0"/>
-              <a:t>2/2/2026</a:t>
+              <a:t>6/7/2026</a:t>
             </a:fld>
             <a:endParaRPr lang="en-US" dirty="0"/>
           </a:p>
@@ -773,7 +897,7 @@
           <a:p>
             <a:fld id="{5C4C4E00-4716-4B48-9D97-535E4F94A274}" type="datetimeFigureOut">
               <a:rPr lang="es-PE" smtClean="0"/>
-              <a:t>2/02/2026</a:t>
+              <a:t>7/06/2026</a:t>
             </a:fld>
             <a:endParaRPr lang="es-PE" dirty="0"/>
           </a:p>
@@ -943,7 +1067,7 @@
           <a:p>
             <a:fld id="{5C4C4E00-4716-4B48-9D97-535E4F94A274}" type="datetimeFigureOut">
               <a:rPr lang="es-PE" smtClean="0"/>
-              <a:t>2/02/2026</a:t>
+              <a:t>7/06/2026</a:t>
             </a:fld>
             <a:endParaRPr lang="es-PE" dirty="0"/>
           </a:p>
@@ -1123,7 +1247,7 @@
           <a:p>
             <a:fld id="{5C4C4E00-4716-4B48-9D97-535E4F94A274}" type="datetimeFigureOut">
               <a:rPr lang="es-PE" smtClean="0"/>
-              <a:t>2/02/2026</a:t>
+              <a:t>7/06/2026</a:t>
             </a:fld>
             <a:endParaRPr lang="es-PE" dirty="0"/>
           </a:p>
@@ -1293,7 +1417,7 @@
           <a:p>
             <a:fld id="{5C4C4E00-4716-4B48-9D97-535E4F94A274}" type="datetimeFigureOut">
               <a:rPr lang="es-PE" smtClean="0"/>
-              <a:t>2/02/2026</a:t>
+              <a:t>7/06/2026</a:t>
             </a:fld>
             <a:endParaRPr lang="es-PE" dirty="0"/>
           </a:p>
@@ -1537,7 +1661,7 @@
           <a:p>
             <a:fld id="{5C4C4E00-4716-4B48-9D97-535E4F94A274}" type="datetimeFigureOut">
               <a:rPr lang="es-PE" smtClean="0"/>
-              <a:t>2/02/2026</a:t>
+              <a:t>7/06/2026</a:t>
             </a:fld>
             <a:endParaRPr lang="es-PE" dirty="0"/>
           </a:p>
@@ -1769,7 +1893,7 @@
           <a:p>
             <a:fld id="{5C4C4E00-4716-4B48-9D97-535E4F94A274}" type="datetimeFigureOut">
               <a:rPr lang="es-PE" smtClean="0"/>
-              <a:t>2/02/2026</a:t>
+              <a:t>7/06/2026</a:t>
             </a:fld>
             <a:endParaRPr lang="es-PE" dirty="0"/>
           </a:p>
@@ -2136,7 +2260,7 @@
           <a:p>
             <a:fld id="{5C4C4E00-4716-4B48-9D97-535E4F94A274}" type="datetimeFigureOut">
               <a:rPr lang="es-PE" smtClean="0"/>
-              <a:t>2/02/2026</a:t>
+              <a:t>7/06/2026</a:t>
             </a:fld>
             <a:endParaRPr lang="es-PE" dirty="0"/>
           </a:p>
@@ -2254,7 +2378,7 @@
           <a:p>
             <a:fld id="{5C4C4E00-4716-4B48-9D97-535E4F94A274}" type="datetimeFigureOut">
               <a:rPr lang="es-PE" smtClean="0"/>
-              <a:t>2/02/2026</a:t>
+              <a:t>7/06/2026</a:t>
             </a:fld>
             <a:endParaRPr lang="es-PE" dirty="0"/>
           </a:p>
@@ -2349,7 +2473,7 @@
           <a:p>
             <a:fld id="{5C4C4E00-4716-4B48-9D97-535E4F94A274}" type="datetimeFigureOut">
               <a:rPr lang="es-PE" smtClean="0"/>
-              <a:t>2/02/2026</a:t>
+              <a:t>7/06/2026</a:t>
             </a:fld>
             <a:endParaRPr lang="es-PE" dirty="0"/>
           </a:p>
@@ -2626,7 +2750,7 @@
           <a:p>
             <a:fld id="{5C4C4E00-4716-4B48-9D97-535E4F94A274}" type="datetimeFigureOut">
               <a:rPr lang="es-PE" smtClean="0"/>
-              <a:t>2/02/2026</a:t>
+              <a:t>7/06/2026</a:t>
             </a:fld>
             <a:endParaRPr lang="es-PE" dirty="0"/>
           </a:p>
@@ -2883,7 +3007,7 @@
           <a:p>
             <a:fld id="{5C4C4E00-4716-4B48-9D97-535E4F94A274}" type="datetimeFigureOut">
               <a:rPr lang="es-PE" smtClean="0"/>
-              <a:t>2/02/2026</a:t>
+              <a:t>7/06/2026</a:t>
             </a:fld>
             <a:endParaRPr lang="es-PE" dirty="0"/>
           </a:p>
@@ -3096,7 +3220,7 @@
           <a:p>
             <a:fld id="{5C4C4E00-4716-4B48-9D97-535E4F94A274}" type="datetimeFigureOut">
               <a:rPr lang="es-PE" smtClean="0"/>
-              <a:t>2/02/2026</a:t>
+              <a:t>7/06/2026</a:t>
             </a:fld>
             <a:endParaRPr lang="es-PE" dirty="0"/>
           </a:p>
@@ -3544,7 +3668,7 @@
         </p:blipFill>
         <p:spPr>
           <a:xfrm>
-            <a:off x="619904" y="2645558"/>
+            <a:off x="792012" y="2645558"/>
             <a:ext cx="5273976" cy="3936266"/>
           </a:xfrm>
           <a:prstGeom prst="rect">
@@ -3596,7 +3720,7 @@
       </p:pic>
       <p:sp>
         <p:nvSpPr>
-          <p:cNvPr id="2" name="CuadroTexto 1">
+          <p:cNvPr id="2" name="PH_NOMBRES_APELLIDOS">
             <a:extLst>
               <a:ext uri="{FF2B5EF4-FFF2-40B4-BE49-F238E27FC236}">
                 <a16:creationId xmlns:a16="http://schemas.microsoft.com/office/drawing/2014/main" id="{8999ECBF-332A-795D-7E69-2FB7C2F9E294}"/>
@@ -3608,7 +3732,7 @@
         </p:nvSpPr>
         <p:spPr>
           <a:xfrm>
-            <a:off x="474329" y="2547371"/>
+            <a:off x="474329" y="2493583"/>
             <a:ext cx="5909343" cy="954107"/>
           </a:xfrm>
           <a:prstGeom prst="rect">
@@ -3826,7 +3950,7 @@
       </p:sp>
       <p:sp>
         <p:nvSpPr>
-          <p:cNvPr id="3" name="Rectángulo 2">
+          <p:cNvPr id="3" name="PH_CONDEDIDO_A">
             <a:extLst>
               <a:ext uri="{FF2B5EF4-FFF2-40B4-BE49-F238E27FC236}">
                 <a16:creationId xmlns:a16="http://schemas.microsoft.com/office/drawing/2014/main" id="{8DC1C730-CF27-EE49-4929-25151E2F6190}"/>
@@ -3838,7 +3962,7 @@
         </p:nvSpPr>
         <p:spPr>
           <a:xfrm>
-            <a:off x="2809279" y="2287819"/>
+            <a:off x="2809279" y="2247478"/>
             <a:ext cx="1239442" cy="306109"/>
           </a:xfrm>
           <a:prstGeom prst="rect">
@@ -3895,20 +4019,22 @@
       </p:sp>
       <p:sp>
         <p:nvSpPr>
-          <p:cNvPr id="19" name="Rectangle 60">
+          <p:cNvPr id="19" name="PH_CONTENIDO_PRINCIPAL">
             <a:extLst>
               <a:ext uri="{FF2B5EF4-FFF2-40B4-BE49-F238E27FC236}">
                 <a16:creationId xmlns:a16="http://schemas.microsoft.com/office/drawing/2014/main" id="{C0D9FAA0-08E8-BE91-7635-49B14F81758C}"/>
               </a:ext>
             </a:extLst>
           </p:cNvPr>
-          <p:cNvSpPr/>
+          <p:cNvSpPr>
+            <a:spLocks/>
+          </p:cNvSpPr>
           <p:nvPr/>
         </p:nvSpPr>
         <p:spPr>
           <a:xfrm>
-            <a:off x="477169" y="3333945"/>
-            <a:ext cx="5903662" cy="2967105"/>
+            <a:off x="419400" y="3408922"/>
+            <a:ext cx="6019200" cy="1769715"/>
           </a:xfrm>
           <a:prstGeom prst="rect">
             <a:avLst/>
@@ -3918,7 +4044,7 @@
           </a:ln>
         </p:spPr>
         <p:txBody>
-          <a:bodyPr vert="horz" lIns="0" tIns="0" rIns="0" bIns="0" rtlCol="0" anchor="ctr">
+          <a:bodyPr vert="horz" wrap="square" lIns="0" tIns="0" rIns="0" bIns="0" rtlCol="0" anchor="t" anchorCtr="1">
             <a:noAutofit/>
           </a:bodyPr>
           <a:lstStyle/>
@@ -4104,57 +4230,6 @@
               </a:rPr>
               <a:t>Por tanto, se expide el presente Diplomado para que se le reconozca como tal.</a:t>
             </a:r>
-          </a:p>
-        </p:txBody>
-      </p:sp>
-      <p:sp>
-        <p:nvSpPr>
-          <p:cNvPr id="20" name="Rectángulo 19">
-            <a:extLst>
-              <a:ext uri="{FF2B5EF4-FFF2-40B4-BE49-F238E27FC236}">
-                <a16:creationId xmlns:a16="http://schemas.microsoft.com/office/drawing/2014/main" id="{E2BAC0BA-6DEF-E8B2-0599-9DAE3B94E3B4}"/>
-              </a:ext>
-            </a:extLst>
-          </p:cNvPr>
-          <p:cNvSpPr/>
-          <p:nvPr/>
-        </p:nvSpPr>
-        <p:spPr>
-          <a:xfrm>
-            <a:off x="1071040" y="3342633"/>
-            <a:ext cx="5167704" cy="184666"/>
-          </a:xfrm>
-          <a:prstGeom prst="rect">
-            <a:avLst/>
-          </a:prstGeom>
-        </p:spPr>
-        <p:txBody>
-          <a:bodyPr wrap="square">
-            <a:spAutoFit/>
-          </a:bodyPr>
-          <a:lstStyle/>
-          <a:p>
-            <a:pPr algn="ctr">
-              <a:spcBef>
-                <a:spcPts val="415"/>
-              </a:spcBef>
-              <a:spcAft>
-                <a:spcPts val="415"/>
-              </a:spcAft>
-            </a:pPr>
-            <a:r>
-              <a:rPr lang="es-PE" sz="600" b="1" dirty="0">
-                <a:latin typeface="Cambria Math" panose="02040503050406030204" pitchFamily="18" charset="0"/>
-                <a:ea typeface="Cambria Math" panose="02040503050406030204" pitchFamily="18" charset="0"/>
-                <a:cs typeface="Times New Roman" panose="02020603050405020304" pitchFamily="18" charset="0"/>
-              </a:rPr>
-              <a:t> </a:t>
-            </a:r>
-            <a:endParaRPr lang="en-US" sz="900" b="1" dirty="0">
-              <a:latin typeface="Cambria Math" panose="02040503050406030204" pitchFamily="18" charset="0"/>
-              <a:ea typeface="Cambria Math" panose="02040503050406030204" pitchFamily="18" charset="0"/>
-              <a:cs typeface="Times New Roman" panose="02020603050405020304" pitchFamily="18" charset="0"/>
-            </a:endParaRPr>
           </a:p>
         </p:txBody>
       </p:sp>
@@ -4194,99 +4269,6 @@
           </a:prstGeom>
         </p:spPr>
       </p:pic>
-      <p:sp>
-        <p:nvSpPr>
-          <p:cNvPr id="15" name="Rectángulo 14">
-            <a:extLst>
-              <a:ext uri="{FF2B5EF4-FFF2-40B4-BE49-F238E27FC236}">
-                <a16:creationId xmlns:a16="http://schemas.microsoft.com/office/drawing/2014/main" id="{6181BA67-E1F2-0033-0081-C78685C4EFFB}"/>
-              </a:ext>
-            </a:extLst>
-          </p:cNvPr>
-          <p:cNvSpPr/>
-          <p:nvPr/>
-        </p:nvSpPr>
-        <p:spPr>
-          <a:xfrm>
-            <a:off x="3246807" y="7258027"/>
-            <a:ext cx="3176336" cy="303929"/>
-          </a:xfrm>
-          <a:prstGeom prst="rect">
-            <a:avLst/>
-          </a:prstGeom>
-        </p:spPr>
-        <p:txBody>
-          <a:bodyPr wrap="square">
-            <a:spAutoFit/>
-          </a:bodyPr>
-          <a:lstStyle/>
-          <a:p>
-            <a:pPr lvl="0" algn="r">
-              <a:lnSpc>
-                <a:spcPct val="115000"/>
-              </a:lnSpc>
-              <a:spcBef>
-                <a:spcPts val="59"/>
-              </a:spcBef>
-            </a:pPr>
-            <a:r>
-              <a:rPr lang="es-PE" sz="1300" dirty="0">
-                <a:solidFill>
-                  <a:prstClr val="black"/>
-                </a:solidFill>
-                <a:latin typeface="Times New Roman" panose="02020603050405020304" pitchFamily="18" charset="0"/>
-                <a:ea typeface="Cambria Math" panose="02040503050406030204" pitchFamily="18" charset="0"/>
-                <a:cs typeface="Times New Roman" panose="02020603050405020304" pitchFamily="18" charset="0"/>
-              </a:rPr>
-              <a:t>Trujillo, {{FECHA_EMISION_LARGA}}</a:t>
-            </a:r>
-            <a:endParaRPr lang="en-US" sz="1300" dirty="0">
-              <a:solidFill>
-                <a:prstClr val="black"/>
-              </a:solidFill>
-              <a:latin typeface="Times New Roman" panose="02020603050405020304" pitchFamily="18" charset="0"/>
-              <a:ea typeface="Cambria Math" panose="02040503050406030204" pitchFamily="18" charset="0"/>
-              <a:cs typeface="Times New Roman" panose="02020603050405020304" pitchFamily="18" charset="0"/>
-            </a:endParaRPr>
-          </a:p>
-        </p:txBody>
-      </p:sp>
-      <p:pic>
-        <p:nvPicPr>
-          <p:cNvPr id="16" name="Imagen 15">
-            <a:extLst>
-              <a:ext uri="{FF2B5EF4-FFF2-40B4-BE49-F238E27FC236}">
-                <a16:creationId xmlns:a16="http://schemas.microsoft.com/office/drawing/2014/main" id="{8AFE8DB8-BB3D-9C4F-317A-D420ABEEF7CD}"/>
-              </a:ext>
-            </a:extLst>
-          </p:cNvPr>
-          <p:cNvPicPr>
-            <a:picLocks noChangeAspect="1"/>
-          </p:cNvPicPr>
-          <p:nvPr/>
-        </p:nvPicPr>
-        <p:blipFill>
-          <a:blip r:embed="rId6" cstate="print">
-            <a:extLst>
-              <a:ext uri="{28A0092B-C50C-407E-A947-70E740481C1C}">
-                <a14:useLocalDpi xmlns:a14="http://schemas.microsoft.com/office/drawing/2010/main" val="0"/>
-              </a:ext>
-            </a:extLst>
-          </a:blip>
-          <a:stretch>
-            <a:fillRect/>
-          </a:stretch>
-        </p:blipFill>
-        <p:spPr>
-          <a:xfrm>
-            <a:off x="4975860" y="6371244"/>
-            <a:ext cx="830904" cy="830904"/>
-          </a:xfrm>
-          <a:prstGeom prst="rect">
-            <a:avLst/>
-          </a:prstGeom>
-        </p:spPr>
-      </p:pic>
       <p:pic>
         <p:nvPicPr>
           <p:cNvPr id="4" name="Imagen 3" descr="Imagen en blanco y negro&#10;&#10;Descripción generada automáticamente con confianza baja">
@@ -4302,7 +4284,7 @@
           <p:nvPr/>
         </p:nvPicPr>
         <p:blipFill>
-          <a:blip r:embed="rId7">
+          <a:blip r:embed="rId6">
             <a:extLst>
               <a:ext uri="{28A0092B-C50C-407E-A947-70E740481C1C}">
                 <a14:useLocalDpi xmlns:a14="http://schemas.microsoft.com/office/drawing/2010/main" val="0"/>
@@ -4317,6 +4299,204 @@
           <a:xfrm>
             <a:off x="1727435" y="7803847"/>
             <a:ext cx="2813850" cy="1216800"/>
+          </a:xfrm>
+          <a:prstGeom prst="rect">
+            <a:avLst/>
+          </a:prstGeom>
+        </p:spPr>
+      </p:pic>
+      <p:sp>
+        <p:nvSpPr>
+          <p:cNvPr id="5" name="Rectángulo 4">
+            <a:extLst>
+              <a:ext uri="{FF2B5EF4-FFF2-40B4-BE49-F238E27FC236}">
+                <a16:creationId xmlns:a16="http://schemas.microsoft.com/office/drawing/2014/main" id="{AFB6F93C-9F22-8EA7-7179-A5F6B3080552}"/>
+              </a:ext>
+            </a:extLst>
+          </p:cNvPr>
+          <p:cNvSpPr/>
+          <p:nvPr/>
+        </p:nvSpPr>
+        <p:spPr>
+          <a:xfrm>
+            <a:off x="3339591" y="7789439"/>
+            <a:ext cx="3176336" cy="303929"/>
+          </a:xfrm>
+          <a:prstGeom prst="rect">
+            <a:avLst/>
+          </a:prstGeom>
+        </p:spPr>
+        <p:txBody>
+          <a:bodyPr wrap="square">
+            <a:spAutoFit/>
+          </a:bodyPr>
+          <a:lstStyle>
+            <a:defPPr>
+              <a:defRPr lang="en-US"/>
+            </a:defPPr>
+            <a:lvl1pPr marL="0" algn="l" defTabSz="457200" rtl="0" eaLnBrk="1" latinLnBrk="0" hangingPunct="1">
+              <a:defRPr sz="1800" kern="1200">
+                <a:solidFill>
+                  <a:schemeClr val="tx1"/>
+                </a:solidFill>
+                <a:latin typeface="+mn-lt"/>
+                <a:ea typeface="+mn-ea"/>
+                <a:cs typeface="+mn-cs"/>
+              </a:defRPr>
+            </a:lvl1pPr>
+            <a:lvl2pPr marL="457200" algn="l" defTabSz="457200" rtl="0" eaLnBrk="1" latinLnBrk="0" hangingPunct="1">
+              <a:defRPr sz="1800" kern="1200">
+                <a:solidFill>
+                  <a:schemeClr val="tx1"/>
+                </a:solidFill>
+                <a:latin typeface="+mn-lt"/>
+                <a:ea typeface="+mn-ea"/>
+                <a:cs typeface="+mn-cs"/>
+              </a:defRPr>
+            </a:lvl2pPr>
+            <a:lvl3pPr marL="914400" algn="l" defTabSz="457200" rtl="0" eaLnBrk="1" latinLnBrk="0" hangingPunct="1">
+              <a:defRPr sz="1800" kern="1200">
+                <a:solidFill>
+                  <a:schemeClr val="tx1"/>
+                </a:solidFill>
+                <a:latin typeface="+mn-lt"/>
+                <a:ea typeface="+mn-ea"/>
+                <a:cs typeface="+mn-cs"/>
+              </a:defRPr>
+            </a:lvl3pPr>
+            <a:lvl4pPr marL="1371600" algn="l" defTabSz="457200" rtl="0" eaLnBrk="1" latinLnBrk="0" hangingPunct="1">
+              <a:defRPr sz="1800" kern="1200">
+                <a:solidFill>
+                  <a:schemeClr val="tx1"/>
+                </a:solidFill>
+                <a:latin typeface="+mn-lt"/>
+                <a:ea typeface="+mn-ea"/>
+                <a:cs typeface="+mn-cs"/>
+              </a:defRPr>
+            </a:lvl4pPr>
+            <a:lvl5pPr marL="1828800" algn="l" defTabSz="457200" rtl="0" eaLnBrk="1" latinLnBrk="0" hangingPunct="1">
+              <a:defRPr sz="1800" kern="1200">
+                <a:solidFill>
+                  <a:schemeClr val="tx1"/>
+                </a:solidFill>
+                <a:latin typeface="+mn-lt"/>
+                <a:ea typeface="+mn-ea"/>
+                <a:cs typeface="+mn-cs"/>
+              </a:defRPr>
+            </a:lvl5pPr>
+            <a:lvl6pPr marL="2286000" algn="l" defTabSz="457200" rtl="0" eaLnBrk="1" latinLnBrk="0" hangingPunct="1">
+              <a:defRPr sz="1800" kern="1200">
+                <a:solidFill>
+                  <a:schemeClr val="tx1"/>
+                </a:solidFill>
+                <a:latin typeface="+mn-lt"/>
+                <a:ea typeface="+mn-ea"/>
+                <a:cs typeface="+mn-cs"/>
+              </a:defRPr>
+            </a:lvl6pPr>
+            <a:lvl7pPr marL="2743200" algn="l" defTabSz="457200" rtl="0" eaLnBrk="1" latinLnBrk="0" hangingPunct="1">
+              <a:defRPr sz="1800" kern="1200">
+                <a:solidFill>
+                  <a:schemeClr val="tx1"/>
+                </a:solidFill>
+                <a:latin typeface="+mn-lt"/>
+                <a:ea typeface="+mn-ea"/>
+                <a:cs typeface="+mn-cs"/>
+              </a:defRPr>
+            </a:lvl7pPr>
+            <a:lvl8pPr marL="3200400" algn="l" defTabSz="457200" rtl="0" eaLnBrk="1" latinLnBrk="0" hangingPunct="1">
+              <a:defRPr sz="1800" kern="1200">
+                <a:solidFill>
+                  <a:schemeClr val="tx1"/>
+                </a:solidFill>
+                <a:latin typeface="+mn-lt"/>
+                <a:ea typeface="+mn-ea"/>
+                <a:cs typeface="+mn-cs"/>
+              </a:defRPr>
+            </a:lvl8pPr>
+            <a:lvl9pPr marL="3657600" algn="l" defTabSz="457200" rtl="0" eaLnBrk="1" latinLnBrk="0" hangingPunct="1">
+              <a:defRPr sz="1800" kern="1200">
+                <a:solidFill>
+                  <a:schemeClr val="tx1"/>
+                </a:solidFill>
+                <a:latin typeface="+mn-lt"/>
+                <a:ea typeface="+mn-ea"/>
+                <a:cs typeface="+mn-cs"/>
+              </a:defRPr>
+            </a:lvl9pPr>
+          </a:lstStyle>
+          <a:p>
+            <a:pPr lvl="0" algn="r">
+              <a:lnSpc>
+                <a:spcPct val="115000"/>
+              </a:lnSpc>
+              <a:spcBef>
+                <a:spcPts val="59"/>
+              </a:spcBef>
+            </a:pPr>
+            <a:r>
+              <a:rPr lang="es-PE" sz="1300" dirty="0">
+                <a:solidFill>
+                  <a:prstClr val="black"/>
+                </a:solidFill>
+                <a:latin typeface="Times New Roman" panose="02020603050405020304" pitchFamily="18" charset="0"/>
+                <a:ea typeface="Cambria Math" panose="02040503050406030204" pitchFamily="18" charset="0"/>
+                <a:cs typeface="Times New Roman" panose="02020603050405020304" pitchFamily="18" charset="0"/>
+              </a:rPr>
+              <a:t>Trujillo, </a:t>
+            </a:r>
+            <a:r>
+              <a:rPr lang="es-ES" sz="1300" dirty="0">
+                <a:solidFill>
+                  <a:srgbClr val="000000"/>
+                </a:solidFill>
+                <a:latin typeface="Times New Roman" panose="02020603050405020304" pitchFamily="18" charset="0"/>
+                <a:ea typeface="Cambria Math" panose="02040503050406030204" pitchFamily="18" charset="0"/>
+                <a:cs typeface="Times New Roman" panose="02020603050405020304" pitchFamily="18" charset="0"/>
+              </a:rPr>
+              <a:t>{{FECHA_EMISION_LARGA}}</a:t>
+            </a:r>
+            <a:endParaRPr lang="en-US" sz="1300" dirty="0">
+              <a:solidFill>
+                <a:prstClr val="black"/>
+              </a:solidFill>
+              <a:latin typeface="Times New Roman" panose="02020603050405020304" pitchFamily="18" charset="0"/>
+              <a:ea typeface="Cambria Math" panose="02040503050406030204" pitchFamily="18" charset="0"/>
+              <a:cs typeface="Times New Roman" panose="02020603050405020304" pitchFamily="18" charset="0"/>
+            </a:endParaRPr>
+          </a:p>
+        </p:txBody>
+      </p:sp>
+      <p:pic>
+        <p:nvPicPr>
+          <p:cNvPr id="7" name="Imagen 6">
+            <a:extLst>
+              <a:ext uri="{FF2B5EF4-FFF2-40B4-BE49-F238E27FC236}">
+                <a16:creationId xmlns:a16="http://schemas.microsoft.com/office/drawing/2014/main" id="{74C6FC0B-5FDE-2C97-66FC-E9A609429D1C}"/>
+              </a:ext>
+            </a:extLst>
+          </p:cNvPr>
+          <p:cNvPicPr>
+            <a:picLocks noChangeAspect="1"/>
+          </p:cNvPicPr>
+          <p:nvPr/>
+        </p:nvPicPr>
+        <p:blipFill>
+          <a:blip r:embed="rId7" cstate="print">
+            <a:extLst>
+              <a:ext uri="{28A0092B-C50C-407E-A947-70E740481C1C}">
+                <a14:useLocalDpi xmlns:a14="http://schemas.microsoft.com/office/drawing/2010/main" val="0"/>
+              </a:ext>
+            </a:extLst>
+          </a:blip>
+          <a:stretch>
+            <a:fillRect/>
+          </a:stretch>
+        </p:blipFill>
+        <p:spPr>
+          <a:xfrm>
+            <a:off x="5140422" y="6958535"/>
+            <a:ext cx="830904" cy="830904"/>
           </a:xfrm>
           <a:prstGeom prst="rect">
             <a:avLst/>
@@ -4396,7 +4576,7 @@
         </p:blipFill>
         <p:spPr>
           <a:xfrm>
-            <a:off x="619904" y="2645558"/>
+            <a:off x="792012" y="2645558"/>
             <a:ext cx="5273976" cy="3936266"/>
           </a:xfrm>
           <a:prstGeom prst="rect">
@@ -4448,7 +4628,7 @@
       </p:pic>
       <p:sp>
         <p:nvSpPr>
-          <p:cNvPr id="10" name="CuadroTexto 9">
+          <p:cNvPr id="10" name="PH_TEMA">
             <a:extLst>
               <a:ext uri="{FF2B5EF4-FFF2-40B4-BE49-F238E27FC236}">
                 <a16:creationId xmlns:a16="http://schemas.microsoft.com/office/drawing/2014/main" id="{D44B2567-D1AD-5922-21FA-C8B8BF799204}"/>
@@ -4767,14 +4947,14 @@
           <p:nvPr>
             <p:extLst>
               <p:ext uri="{D42A27DB-BD31-4B8C-83A1-F6EECF244321}">
-                <p14:modId xmlns:p14="http://schemas.microsoft.com/office/powerpoint/2010/main" val="3866362663"/>
+                <p14:modId xmlns:p14="http://schemas.microsoft.com/office/powerpoint/2010/main" val="1937327202"/>
               </p:ext>
             </p:extLst>
           </p:nvPr>
         </p:nvGraphicFramePr>
         <p:xfrm>
           <a:off x="619904" y="8314295"/>
-          <a:ext cx="2286000" cy="1107330"/>
+          <a:ext cx="2286000" cy="1229250"/>
         </p:xfrm>
         <a:graphic>
           <a:graphicData uri="http://schemas.openxmlformats.org/drawingml/2006/table">
@@ -4806,11 +4986,15 @@
                     <a:p>
                       <a:r>
                         <a:rPr lang="es-ES" sz="800" b="1" dirty="0"/>
-                        <a:t>CÓDIGO: UNT-CCSS/2022 -</a:t>
+                        <a:t>CÓDIGO: UNT-CCSS/</a:t>
                       </a:r>
                       <a:r>
-                        <a:rPr lang="es-ES" sz="800" b="1" baseline="0" dirty="0"/>
-                        <a:t> CC</a:t>
+                        <a:rPr lang="es-ES" sz="800" b="1"/>
+                        <a:t>2022 –</a:t>
+                      </a:r>
+                      <a:r>
+                        <a:rPr lang="es-ES" sz="800" b="1" baseline="0"/>
+                        <a:t> {{INICIALES}}</a:t>
                       </a:r>
                       <a:endParaRPr lang="es-ES" sz="800" b="1" dirty="0"/>
                     </a:p>
@@ -5187,7 +5371,7 @@
       </p:graphicFrame>
       <p:graphicFrame>
         <p:nvGraphicFramePr>
-          <p:cNvPr id="14" name="Tabla 13">
+          <p:cNvPr id="14" name="PH_TABLA">
             <a:extLst>
               <a:ext uri="{FF2B5EF4-FFF2-40B4-BE49-F238E27FC236}">
                 <a16:creationId xmlns:a16="http://schemas.microsoft.com/office/drawing/2014/main" id="{727B0309-C2F5-4DEB-3AF8-D7FD142D7B92}"/>
@@ -5200,7 +5384,7 @@
           <p:nvPr>
             <p:extLst>
               <p:ext uri="{D42A27DB-BD31-4B8C-83A1-F6EECF244321}">
-                <p14:modId xmlns:p14="http://schemas.microsoft.com/office/powerpoint/2010/main" val="1728316434"/>
+                <p14:modId xmlns:p14="http://schemas.microsoft.com/office/powerpoint/2010/main" val="2048178501"/>
               </p:ext>
             </p:extLst>
           </p:nvPr>
@@ -5385,7 +5569,7 @@
                     <a:p>
                       <a:pPr algn="ctr"/>
                       <a:r>
-                        <a:rPr lang="es-ES" sz="1000" dirty="0"/>
+                        <a:rPr lang="es-ES" sz="900" dirty="0"/>
                         <a:t>{{MODULO_1}}</a:t>
                       </a:r>
                     </a:p>
@@ -5478,7 +5662,7 @@
                         <a:defRPr/>
                       </a:pPr>
                       <a:r>
-                        <a:rPr lang="es-ES" sz="1000" dirty="0"/>
+                        <a:rPr lang="es-ES" sz="900" dirty="0"/>
                         <a:t>{{MODULO_2}}</a:t>
                       </a:r>
                     </a:p>
@@ -5551,10 +5735,10 @@
                         <a:defRPr/>
                       </a:pPr>
                       <a:r>
-                        <a:rPr lang="es-ES" sz="1000" dirty="0"/>
+                        <a:rPr lang="es-ES" sz="900" dirty="0"/>
                         <a:t>{{MODULO_3}}</a:t>
                       </a:r>
-                      <a:endParaRPr lang="es-PE" sz="1000" b="0" i="0" kern="1200" dirty="0">
+                      <a:endParaRPr lang="es-PE" sz="900" b="0" i="0" kern="1200" dirty="0">
                         <a:solidFill>
                           <a:schemeClr val="dk1"/>
                         </a:solidFill>
@@ -5653,10 +5837,10 @@
                         <a:defRPr/>
                       </a:pPr>
                       <a:r>
-                        <a:rPr lang="es-ES" sz="1000" dirty="0"/>
+                        <a:rPr lang="es-ES" sz="900" dirty="0"/>
                         <a:t>{{MODULO_4}}</a:t>
                       </a:r>
-                      <a:endParaRPr lang="es-PE" sz="1000" b="0" i="0" kern="1200" dirty="0">
+                      <a:endParaRPr lang="es-PE" sz="900" b="0" i="0" kern="1200" dirty="0">
                         <a:solidFill>
                           <a:schemeClr val="dk1"/>
                         </a:solidFill>
@@ -5751,10 +5935,10 @@
                         <a:defRPr/>
                       </a:pPr>
                       <a:r>
-                        <a:rPr lang="es-ES" sz="1000" dirty="0"/>
+                        <a:rPr lang="es-ES" sz="900" dirty="0"/>
                         <a:t>{{MODULO_5}}</a:t>
                       </a:r>
-                      <a:endParaRPr lang="es-PE" sz="1000" b="0" i="0" kern="1200" dirty="0">
+                      <a:endParaRPr lang="es-PE" sz="900" b="0" i="0" kern="1200" dirty="0">
                         <a:solidFill>
                           <a:schemeClr val="dk1"/>
                         </a:solidFill>
@@ -5856,10 +6040,10 @@
                         <a:defRPr/>
                       </a:pPr>
                       <a:r>
-                        <a:rPr lang="es-PE" sz="1000" dirty="0"/>
+                        <a:rPr lang="es-PE" sz="900" dirty="0"/>
                         <a:t>{{MODULO_6}}</a:t>
                       </a:r>
-                      <a:endParaRPr lang="es-PE" sz="1000" b="0" i="0" kern="1200" dirty="0">
+                      <a:endParaRPr lang="es-PE" sz="900" b="0" i="0" kern="1200" dirty="0">
                         <a:solidFill>
                           <a:schemeClr val="dk1"/>
                         </a:solidFill>
@@ -5957,10 +6141,10 @@
                         <a:defRPr/>
                       </a:pPr>
                       <a:r>
-                        <a:rPr lang="es-ES" sz="1000" dirty="0"/>
+                        <a:rPr lang="es-ES" sz="900" dirty="0"/>
                         <a:t>{{MODULO_7}}</a:t>
                       </a:r>
-                      <a:endParaRPr lang="es-PE" sz="1000" b="0" i="0" kern="1200" dirty="0">
+                      <a:endParaRPr lang="es-PE" sz="900" b="0" i="0" kern="1200" dirty="0">
                         <a:solidFill>
                           <a:schemeClr val="dk1"/>
                         </a:solidFill>
@@ -6062,7 +6246,7 @@
                         <a:defRPr/>
                       </a:pPr>
                       <a:r>
-                        <a:rPr lang="es-ES" sz="1000" dirty="0"/>
+                        <a:rPr lang="es-ES" sz="900" dirty="0"/>
                         <a:t>{{MODULO_8}}</a:t>
                       </a:r>
                     </a:p>
@@ -6344,10 +6528,10 @@
       </p:pic>
       <p:sp>
         <p:nvSpPr>
-          <p:cNvPr id="4" name="CuadroTexto 1">
+          <p:cNvPr id="5" name="CuadroTexto 4">
             <a:extLst>
               <a:ext uri="{FF2B5EF4-FFF2-40B4-BE49-F238E27FC236}">
-                <a16:creationId xmlns:a16="http://schemas.microsoft.com/office/drawing/2014/main" id="{73FC219E-6E54-02C6-2D68-ED6FE3FBB5EC}"/>
+                <a16:creationId xmlns:a16="http://schemas.microsoft.com/office/drawing/2014/main" id="{A8357A5C-81A6-8587-7500-C885DD1CA711}"/>
               </a:ext>
             </a:extLst>
           </p:cNvPr>
@@ -6356,7 +6540,7 @@
         </p:nvSpPr>
         <p:spPr>
           <a:xfrm>
-            <a:off x="2905904" y="8272947"/>
+            <a:off x="2165696" y="8339798"/>
             <a:ext cx="1397690" cy="369332"/>
           </a:xfrm>
           <a:prstGeom prst="rect">
@@ -6465,10 +6649,9 @@
           </a:lstStyle>
           <a:p>
             <a:r>
-              <a:rPr lang="es-PE"/>
+              <a:rPr lang="es-PE" dirty="0"/>
               <a:t>{{QR_CODE}}</a:t>
             </a:r>
-            <a:endParaRPr lang="es-PE" dirty="0"/>
           </a:p>
         </p:txBody>
       </p:sp>
